--- a/media/exports/reports/2026-07/volunteers.pptx
+++ b/media/exports/reports/2026-07/volunteers.pptx
@@ -197,22 +197,22 @@
               <c:strCache>
                 <c:ptCount val="6"/>
                 <c:pt idx="0">
-                  <c:v>Mental health first aid</c:v>
+                  <c:v>Volunteer coordinator</c:v>
                 </c:pt>
                 <c:pt idx="1">
-                  <c:v>Volunteer coordinator</c:v>
+                  <c:v>Digital literacy</c:v>
                 </c:pt>
                 <c:pt idx="2">
                   <c:v>Community meals</c:v>
                 </c:pt>
                 <c:pt idx="3">
-                  <c:v>Digital literacy</c:v>
+                  <c:v>Housing support</c:v>
                 </c:pt>
                 <c:pt idx="4">
                   <c:v>Youth outreach</c:v>
                 </c:pt>
                 <c:pt idx="5">
-                  <c:v>Housing support</c:v>
+                  <c:v>Mental health first aid</c:v>
                 </c:pt>
               </c:strCache>
             </c:strRef>
@@ -224,22 +224,22 @@
                 <c:formatCode>#,##0;[Red](#,##0)</c:formatCode>
                 <c:ptCount val="6"/>
                 <c:pt idx="0">
-                  <c:v>124.0</c:v>
+                  <c:v>63.0</c:v>
                 </c:pt>
                 <c:pt idx="1">
-                  <c:v>127.5</c:v>
+                  <c:v>163.5</c:v>
                 </c:pt>
                 <c:pt idx="2">
-                  <c:v>137.0</c:v>
+                  <c:v>172.5</c:v>
                 </c:pt>
                 <c:pt idx="3">
-                  <c:v>161.5</c:v>
+                  <c:v>176.0</c:v>
                 </c:pt>
                 <c:pt idx="4">
-                  <c:v>171.5</c:v>
+                  <c:v>179.0</c:v>
                 </c:pt>
                 <c:pt idx="5">
-                  <c:v>196.5</c:v>
+                  <c:v>184.0</c:v>
                 </c:pt>
               </c:numCache>
             </c:numRef>
@@ -303,7 +303,7 @@
       <c:valAx>
         <c:axId val="-2113994440"/>
         <c:scaling>
-          <c:max val="225.975"/>
+          <c:max val="211.6"/>
           <c:min val="0.0"/>
         </c:scaling>
         <c:delete/>
@@ -463,70 +463,70 @@
                 <c:formatCode>#,##0;[Red](#,##0)</c:formatCode>
                 <c:ptCount val="22"/>
                 <c:pt idx="0">
-                  <c:v>317.5</c:v>
+                  <c:v>381.0</c:v>
                 </c:pt>
                 <c:pt idx="1">
-                  <c:v>392.0</c:v>
+                  <c:v>373.5</c:v>
                 </c:pt>
                 <c:pt idx="2">
-                  <c:v>363.5</c:v>
+                  <c:v>383.5</c:v>
                 </c:pt>
                 <c:pt idx="3">
-                  <c:v>399.0</c:v>
+                  <c:v>387.5</c:v>
                 </c:pt>
                 <c:pt idx="4">
-                  <c:v>422.0</c:v>
+                  <c:v>376.5</c:v>
                 </c:pt>
                 <c:pt idx="5">
-                  <c:v>451.5</c:v>
+                  <c:v>444.0</c:v>
                 </c:pt>
                 <c:pt idx="6">
-                  <c:v>445.0</c:v>
+                  <c:v>422.5</c:v>
                 </c:pt>
                 <c:pt idx="7">
-                  <c:v>513.0</c:v>
+                  <c:v>562.0</c:v>
                 </c:pt>
                 <c:pt idx="8">
-                  <c:v>529.0</c:v>
+                  <c:v>568.0</c:v>
                 </c:pt>
                 <c:pt idx="9">
-                  <c:v>586.0</c:v>
+                  <c:v>609.5</c:v>
                 </c:pt>
                 <c:pt idx="10">
-                  <c:v>560.5</c:v>
+                  <c:v>627.0</c:v>
                 </c:pt>
                 <c:pt idx="11">
-                  <c:v>625.5</c:v>
+                  <c:v>708.5</c:v>
                 </c:pt>
                 <c:pt idx="12">
-                  <c:v>669.5</c:v>
+                  <c:v>817.0</c:v>
                 </c:pt>
                 <c:pt idx="13">
-                  <c:v>626.5</c:v>
+                  <c:v>780.5</c:v>
                 </c:pt>
                 <c:pt idx="14">
-                  <c:v>683.0</c:v>
+                  <c:v>830.5</c:v>
                 </c:pt>
                 <c:pt idx="15">
-                  <c:v>711.5</c:v>
+                  <c:v>817.5</c:v>
                 </c:pt>
                 <c:pt idx="16">
-                  <c:v>700.0</c:v>
+                  <c:v>781.0</c:v>
                 </c:pt>
                 <c:pt idx="17">
-                  <c:v>772.0</c:v>
+                  <c:v>870.0</c:v>
                 </c:pt>
                 <c:pt idx="18">
-                  <c:v>794.5</c:v>
+                  <c:v>816.0</c:v>
                 </c:pt>
                 <c:pt idx="19">
-                  <c:v>811.0</c:v>
+                  <c:v>830.5</c:v>
                 </c:pt>
                 <c:pt idx="20">
-                  <c:v>819.0</c:v>
+                  <c:v>878.5</c:v>
                 </c:pt>
                 <c:pt idx="21">
-                  <c:v>918.0</c:v>
+                  <c:v>938.0</c:v>
                 </c:pt>
               </c:numCache>
             </c:numRef>
@@ -1100,7 +1100,7 @@
           <a:lstStyle/>
           <a:p>
             <a:r>
-              <a:t>How many volunteer hours go into each program?. Volunteer hours, July: 918.0 h; Volunteers who did a shift, July: 60; Hours per volunteer, July: 15.3 h; July last year: 586.0 h. 60 volunteers gave 918.0 h in July, against 819.0 h in June. Housing support drew the most (196.5 h, 21.4%). Mental health first aid had the fewest volunteer hours (124.0 h). Hours are up 56.7% on July last year.</a:t>
+              <a:t>How many volunteer hours go into each program?. Volunteer hours, July: 938.0 h; Volunteers who did a shift, July: 60; Hours per volunteer, July: 15.6 h; July last year: 609.5 h. 60 volunteers gave 938.0 h in July, against 878.5 h in June. Mental health first aid drew the most (184.0 h, 19.6%). Volunteer coordinator had the fewest volunteer hours (63.0 h). Hours are up 53.9% on July last year.</a:t>
             </a:r>
           </a:p>
         </p:txBody>
@@ -4585,7 +4585,7 @@
                 </a:solidFill>
                 <a:latin typeface="Roboto"/>
               </a:rPr>
-              <a:t>Data retrieved 2pm, Tue 6 Oct 2026 · Generated 8 Oct 2026, 6:29pm · Sample data · Made with Python (python-pptx)</a:t>
+              <a:t>Data retrieved 2pm, Tue 6 Oct 2026 · Generated 8 Oct 2026, 11:41pm · Sample data · Made with Python (python-pptx)</a:t>
             </a:r>
           </a:p>
         </p:txBody>
@@ -4931,7 +4931,7 @@
                 </a:solidFill>
                 <a:latin typeface="Roboto"/>
               </a:rPr>
-              <a:t>918.0 h</a:t>
+              <a:t>938.0 h</a:t>
             </a:r>
           </a:p>
         </p:txBody>
@@ -4970,7 +4970,7 @@
                 </a:solidFill>
                 <a:latin typeface="Roboto"/>
               </a:rPr>
-              <a:t>June 819.0 h</a:t>
+              <a:t>June 878.5 h</a:t>
             </a:r>
           </a:p>
         </p:txBody>
@@ -5136,7 +5136,7 @@
                 </a:solidFill>
                 <a:latin typeface="Roboto"/>
               </a:rPr>
-              <a:t>June 58</a:t>
+              <a:t>June 60</a:t>
             </a:r>
           </a:p>
         </p:txBody>
@@ -5263,7 +5263,7 @@
                 </a:solidFill>
                 <a:latin typeface="Roboto"/>
               </a:rPr>
-              <a:t>15.3 h</a:t>
+              <a:t>15.6 h</a:t>
             </a:r>
           </a:p>
         </p:txBody>
@@ -5429,7 +5429,7 @@
                 </a:solidFill>
                 <a:latin typeface="Roboto"/>
               </a:rPr>
-              <a:t>586.0 h</a:t>
+              <a:t>609.5 h</a:t>
             </a:r>
           </a:p>
         </p:txBody>
@@ -5468,7 +5468,7 @@
                 </a:solidFill>
                 <a:latin typeface="Roboto"/>
               </a:rPr>
-              <a:t>38 volunteers</a:t>
+              <a:t>41 volunteers</a:t>
             </a:r>
           </a:p>
         </p:txBody>
@@ -5613,7 +5613,7 @@
                 </a:solidFill>
                 <a:latin typeface="Roboto"/>
               </a:rPr>
-              <a:t>60 volunteers gave 918.0 h in July, against 819.0 h in June. Housing support drew the most (196.5 h, 21.4%).</a:t>
+              <a:t>60 volunteers gave 938.0 h in July, against 878.5 h in June. Mental health first aid drew the most (184.0 h, 19.6%).</a:t>
             </a:r>
           </a:p>
         </p:txBody>
@@ -5740,7 +5740,7 @@
                 </a:solidFill>
                 <a:latin typeface="Roboto"/>
               </a:rPr>
-              <a:t>Mental health first aid had the fewest volunteer hours (124.0 h). Hours are up 56.7% on July last year.</a:t>
+              <a:t>Volunteer coordinator had the fewest volunteer hours (63.0 h). Hours are up 53.9% on July last year.</a:t>
             </a:r>
           </a:p>
         </p:txBody>
@@ -5818,7 +5818,7 @@
                 </a:solidFill>
                 <a:latin typeface="Roboto"/>
               </a:rPr>
-              <a:t>Data retrieved 2pm, Tue 6 Oct 2026 · Generated 8 Oct 2026, 6:29pm · Sample data · Made with Python (python-pptx)</a:t>
+              <a:t>Data retrieved 2pm, Tue 6 Oct 2026 · Generated 8 Oct 2026, 11:41pm · Sample data · Made with Python (python-pptx)</a:t>
             </a:r>
           </a:p>
         </p:txBody>
@@ -6133,7 +6133,7 @@
                 </a:solidFill>
                 <a:latin typeface="Roboto"/>
               </a:rPr>
-              <a:t>Data retrieved 2pm, Tue 6 Oct 2026 · Generated 8 Oct 2026, 6:29pm · Sample data · Made with Python (python-pptx)</a:t>
+              <a:t>Data retrieved 2pm, Tue 6 Oct 2026 · Generated 8 Oct 2026, 11:41pm · Sample data · Made with Python (python-pptx)</a:t>
             </a:r>
           </a:p>
         </p:txBody>

--- a/media/exports/reports/2026-07/volunteers.pptx
+++ b/media/exports/reports/2026-07/volunteers.pptx
@@ -1030,7 +1030,7 @@
           <a:lstStyle/>
           <a:p>
             <a:r>
-              <a:t>How many volunteer hours go into each program?. Sample Community Services Ltd. Period: July 2026. Every volunteer shift: who (a code, not a name), which program, and how many hours.</a:t>
+              <a:t>How many volunteer hours go into each program?. Sample Community Services Ltd. Period: July 2026. In short: 938.0 h of volunteer time in July, from 60 volunteers; most went to Mental health first aid. Every volunteer shift: who (a code, not a name), which program, and how many hours.</a:t>
             </a:r>
           </a:p>
         </p:txBody>
@@ -4395,7 +4395,7 @@
         <p:spPr>
           <a:xfrm>
             <a:off x="457200" y="3703320"/>
-            <a:ext cx="11277295" cy="313690"/>
+            <a:ext cx="11277295" cy="535940"/>
           </a:xfrm>
           <a:prstGeom prst="rect">
             <a:avLst/>
@@ -4420,7 +4420,7 @@
                 </a:solidFill>
                 <a:latin typeface="Roboto"/>
               </a:rPr>
-              <a:t>Period: July 2026. Every volunteer shift: who (a code, not a name), which program, and how many hours.</a:t>
+              <a:t>Period: July 2026. In short: 938.0 h of volunteer time in July, from 60 volunteers; most went to Mental health first aid. Every volunteer shift: who (a code, not a name), which program, and how many hours.</a:t>
             </a:r>
           </a:p>
         </p:txBody>
@@ -4433,7 +4433,7 @@
         </p:nvSpPr>
         <p:spPr>
           <a:xfrm>
-            <a:off x="457200" y="4108450"/>
+            <a:off x="457200" y="4330700"/>
             <a:ext cx="11277295" cy="1097280"/>
           </a:xfrm>
           <a:prstGeom prst="rect">
@@ -4585,7 +4585,7 @@
                 </a:solidFill>
                 <a:latin typeface="Roboto"/>
               </a:rPr>
-              <a:t>Data retrieved 2pm, Tue 6 Oct 2026 · Generated 8 Oct 2026, 11:41pm · Sample data · Made with Python (python-pptx)</a:t>
+              <a:t>Data retrieved 2pm, Tue 6 Oct 2026 · Generated 10 Oct 2026, 9:55pm · Sample data · Made with Python (python-pptx)</a:t>
             </a:r>
           </a:p>
         </p:txBody>
@@ -5818,7 +5818,7 @@
                 </a:solidFill>
                 <a:latin typeface="Roboto"/>
               </a:rPr>
-              <a:t>Data retrieved 2pm, Tue 6 Oct 2026 · Generated 8 Oct 2026, 11:41pm · Sample data · Made with Python (python-pptx)</a:t>
+              <a:t>Data retrieved 2pm, Tue 6 Oct 2026 · Generated 10 Oct 2026, 9:55pm · Sample data · Made with Python (python-pptx)</a:t>
             </a:r>
           </a:p>
         </p:txBody>
@@ -6133,7 +6133,7 @@
                 </a:solidFill>
                 <a:latin typeface="Roboto"/>
               </a:rPr>
-              <a:t>Data retrieved 2pm, Tue 6 Oct 2026 · Generated 8 Oct 2026, 11:41pm · Sample data · Made with Python (python-pptx)</a:t>
+              <a:t>Data retrieved 2pm, Tue 6 Oct 2026 · Generated 10 Oct 2026, 9:55pm · Sample data · Made with Python (python-pptx)</a:t>
             </a:r>
           </a:p>
         </p:txBody>
